--- a/docs/Prowess_Env_Quick_Reference.pptx
+++ b/docs/Prowess_Env_Quick_Reference.pptx
@@ -4991,7 +4991,7 @@
                 <a:ea typeface="Courier New" pitchFamily="34" charset="-122"/>
                 <a:cs typeface="Courier New" pitchFamily="34" charset="-120"/>
               </a:rPr>
-              <a:t>supabase db push --project-ref \</a:t>
+              <a:t>git push origin main</a:t>
             </a:r>
             <a:endParaRPr lang="en-US" sz="1100" dirty="0"/>
           </a:p>
@@ -5028,7 +5028,7 @@
                 <a:ea typeface="Courier New" pitchFamily="34" charset="-122"/>
                 <a:cs typeface="Courier New" pitchFamily="34" charset="-120"/>
               </a:rPr>
-              <a:t>  etmnumptfadkynbsgszz</a:t>
+              <a:t># then approve run in Actions</a:t>
             </a:r>
             <a:endParaRPr lang="en-US" sz="1100" dirty="0"/>
           </a:p>
@@ -5065,7 +5065,7 @@
                 <a:ea typeface="Courier New" pitchFamily="34" charset="-122"/>
                 <a:cs typeface="Courier New" pitchFamily="34" charset="-120"/>
               </a:rPr>
-              <a:t>git push origin main</a:t>
+              <a:t># migrations apply</a:t>
             </a:r>
             <a:endParaRPr lang="en-US" sz="1100" dirty="0"/>
           </a:p>
@@ -5107,7 +5107,7 @@
                 <a:ea typeface="Calibri" pitchFamily="34" charset="-122"/>
                 <a:cs typeface="Calibri" pitchFamily="34" charset="-120"/>
               </a:rPr>
-              <a:t>Order matters: migration BEFORE code push. New frontend will crash on missing schema.</a:t>
+              <a:t>Push once. Workflow triggers Vercel build + DB migration (with approval). Code and schema promoted together.</a:t>
             </a:r>
             <a:endParaRPr lang="en-US" sz="1200" dirty="0"/>
           </a:p>
@@ -5423,7 +5423,7 @@
                 <a:ea typeface="Courier New" pitchFamily="34" charset="-122"/>
                 <a:cs typeface="Courier New" pitchFamily="34" charset="-120"/>
               </a:rPr>
-              <a:t>supabase db push --project-ref \</a:t>
+              <a:t># then approve run in Actions</a:t>
             </a:r>
             <a:endParaRPr lang="en-US" sz="1100" dirty="0"/>
           </a:p>
@@ -5460,7 +5460,7 @@
                 <a:ea typeface="Courier New" pitchFamily="34" charset="-122"/>
                 <a:cs typeface="Courier New" pitchFamily="34" charset="-120"/>
               </a:rPr>
-              <a:t>  okpnubnswpgybpzgwgtr</a:t>
+              <a:t># (uat env, Vijey approves)</a:t>
             </a:r>
             <a:endParaRPr lang="en-US" sz="1100" dirty="0"/>
           </a:p>
@@ -5502,7 +5502,7 @@
                 <a:ea typeface="Calibri" pitchFamily="34" charset="-122"/>
                 <a:cs typeface="Calibri" pitchFamily="34" charset="-120"/>
               </a:rPr>
-              <a:t>Vercel auto-builds → uat.prowessapp.net. Do this once Dev is validated.</a:t>
+              <a:t>Vercel builds UAT. Workflow pushes migrations after approval. Do this once Dev is validated.</a:t>
             </a:r>
             <a:endParaRPr lang="en-US" sz="1200" dirty="0"/>
           </a:p>
@@ -5563,7 +5563,7 @@
                 <a:ea typeface="Calibri" pitchFamily="34" charset="-122"/>
                 <a:cs typeface="Calibri" pitchFamily="34" charset="-120"/>
               </a:rPr>
-              <a:t>Future — Promote UAT → Prod: </a:t>
+              <a:t>Prod (when live): </a:t>
             </a:r>
             <a:pPr indent="0" marL="0">
               <a:buNone/>
@@ -5591,7 +5591,7 @@
                 <a:ea typeface="Calibri" pitchFamily="34" charset="-122"/>
                 <a:cs typeface="Calibri" pitchFamily="34" charset="-120"/>
               </a:rPr>
-              <a:t>  ·  then </a:t>
+              <a:t>  ·  then approve UAT+Prod workflow runs </a:t>
             </a:r>
             <a:pPr indent="0" marL="0">
               <a:buNone/>
@@ -5605,7 +5605,7 @@
                 <a:ea typeface="Courier New" pitchFamily="34" charset="-122"/>
                 <a:cs typeface="Courier New" pitchFamily="34" charset="-120"/>
               </a:rPr>
-              <a:t>supabase db push --project-ref &lt;prod-ref&gt;</a:t>
+              <a:t>in GitHub Actions.</a:t>
             </a:r>
             <a:endParaRPr lang="en-US" sz="1100" dirty="0"/>
           </a:p>
@@ -6047,7 +6047,7 @@
                 <a:ea typeface="Calibri" pitchFamily="34" charset="-122"/>
                 <a:cs typeface="Calibri" pitchFamily="34" charset="-120"/>
               </a:rPr>
-              <a:t>In each env: apply the migration first, then deploy the code that uses it. Never the reverse.</a:t>
+              <a:t>Push migrations in the same commit as the code. Workflow applies them before you approve.</a:t>
             </a:r>
             <a:endParaRPr lang="en-US" sz="1200" dirty="0"/>
           </a:p>
@@ -6171,7 +6171,7 @@
                 <a:ea typeface="Cambria" pitchFamily="34" charset="-122"/>
                 <a:cs typeface="Cambria" pitchFamily="34" charset="-120"/>
               </a:rPr>
-              <a:t>Push to main = Dev deploys</a:t>
+              <a:t>One push = frontend + DB</a:t>
             </a:r>
             <a:endParaRPr lang="en-US" sz="1500" dirty="0"/>
           </a:p>
@@ -6213,7 +6213,7 @@
                 <a:ea typeface="Calibri" pitchFamily="34" charset="-122"/>
                 <a:cs typeface="Calibri" pitchFamily="34" charset="-120"/>
               </a:rPr>
-              <a:t>No dashboard clicks. Vercel auto-detects the push. Same for staging → UAT.</a:t>
+              <a:t>Vercel deploys frontend automatically. GitHub Actions applies DB migrations (with approval).</a:t>
             </a:r>
             <a:endParaRPr lang="en-US" sz="1200" dirty="0"/>
           </a:p>
